--- a/paper/icaif/figures/figures_editable.pptx
+++ b/paper/icaif/figures/figures_editable.pptx
@@ -8,8 +8,8 @@
     <p:notesMasterId r:id="rId4"/>
   </p:notesMasterIdLst>
   <p:sldIdLst>
-    <p:sldId id="256" r:id="rId2"/>
-    <p:sldId id="257" r:id="rId3"/>
+    <p:sldId id="256" r:id="rId3"/>
+    <p:sldId id="257" r:id="rId5"/>
   </p:sldIdLst>
   <p:sldSz cx="12192000" cy="6858000"/>
   <p:notesSz cx="6858000" cy="9144000"/>
@@ -151,9 +151,7 @@
         <p:txBody>
           <a:bodyPr/>
           <a:lstStyle/>
-          <a:p>
-            <a:endParaRPr/>
-          </a:p>
+          <a:p/>
         </p:txBody>
       </p:sp>
       <p:sp>
@@ -174,9 +172,7 @@
         <p:txBody>
           <a:bodyPr/>
           <a:lstStyle/>
-          <a:p>
-            <a:endParaRPr/>
-          </a:p>
+          <a:p/>
         </p:txBody>
       </p:sp>
       <p:sp>
@@ -197,9 +193,7 @@
         <p:txBody>
           <a:bodyPr/>
           <a:lstStyle/>
-          <a:p>
-            <a:endParaRPr/>
-          </a:p>
+          <a:p/>
         </p:txBody>
       </p:sp>
       <p:sp>
@@ -220,9 +214,7 @@
         <p:txBody>
           <a:bodyPr/>
           <a:lstStyle/>
-          <a:p>
-            <a:endParaRPr/>
-          </a:p>
+          <a:p/>
         </p:txBody>
       </p:sp>
       <p:sp>
@@ -243,9 +235,7 @@
         <p:txBody>
           <a:bodyPr/>
           <a:lstStyle/>
-          <a:p>
-            <a:endParaRPr/>
-          </a:p>
+          <a:p/>
         </p:txBody>
       </p:sp>
       <p:sp>
@@ -266,9 +256,7 @@
         <p:txBody>
           <a:bodyPr/>
           <a:lstStyle/>
-          <a:p>
-            <a:endParaRPr/>
-          </a:p>
+          <a:p/>
         </p:txBody>
       </p:sp>
     </p:spTree>
@@ -351,9 +339,7 @@
         <p:txBody>
           <a:bodyPr/>
           <a:lstStyle/>
-          <a:p>
-            <a:endParaRPr/>
-          </a:p>
+          <a:p/>
         </p:txBody>
       </p:sp>
     </p:spTree>
@@ -433,9 +419,7 @@
         <p:txBody>
           <a:bodyPr/>
           <a:lstStyle/>
-          <a:p>
-            <a:endParaRPr/>
-          </a:p>
+          <a:p/>
         </p:txBody>
       </p:sp>
     </p:spTree>
@@ -473,7 +457,7 @@
 
 <file path=ppt/slideMasters/slideMaster1.xml><?xml version="1.0" encoding="utf-8"?>
 <p:sldMaster xmlns:a="http://schemas.openxmlformats.org/drawingml/2006/main" xmlns:r="http://schemas.openxmlformats.org/officeDocument/2006/relationships" xmlns:p="http://schemas.openxmlformats.org/presentationml/2006/main">
-  <p:cSld name="Master">
+  <p:cSld>
     <p:bg>
       <p:bgRef idx="1001">
         <a:schemeClr val="bg1"/>
@@ -806,22 +790,16 @@
       </p:grpSpPr>
       <p:sp>
         <p:nvSpPr>
-          <p:cNvPr id="27" name="Rectangle 26">
-            <a:extLst>
-              <a:ext uri="{FF2B5EF4-FFF2-40B4-BE49-F238E27FC236}">
-                <a16:creationId xmlns:a16="http://schemas.microsoft.com/office/drawing/2014/main" id="{3ABDCB05-51EE-4108-BF8F-C267DE787B10}"/>
-              </a:ext>
-            </a:extLst>
-          </p:cNvPr>
-          <p:cNvSpPr>
-            <a:spLocks noGrp="1"/>
-          </p:cNvSpPr>
-          <p:nvPr/>
-        </p:nvSpPr>
-        <p:spPr>
-          <a:xfrm>
-            <a:off x="552450" y="323850"/>
-            <a:ext cx="7620000" cy="514350"/>
+          <p:cNvPr id="3" name="Rectangle 2"/>
+          <p:cNvSpPr>
+            <a:spLocks noGrp="1"/>
+          </p:cNvSpPr>
+          <p:nvPr/>
+        </p:nvSpPr>
+        <p:spPr>
+          <a:xfrm>
+            <a:off x="666750" y="1152525"/>
+            <a:ext cx="2857500" cy="266700"/>
           </a:xfrm>
           <a:prstGeom prst="rect">
             <a:avLst/>
@@ -836,42 +814,41 @@
           <a:bodyPr/>
           <a:lstStyle/>
           <a:p>
-            <a:pPr algn="l">
-              <a:defRPr sz="2850" b="1">
-                <a:solidFill>
-                  <a:srgbClr val="0B163F"/>
-                </a:solidFill>
-              </a:defRPr>
-            </a:pPr>
-            <a:r>
-              <a:rPr sz="2850" b="1">
-                <a:solidFill>
-                  <a:srgbClr val="0B163F"/>
-                </a:solidFill>
-              </a:rPr>
-              <a:t>Figure 1. Data-first taxonomy</a:t>
-            </a:r>
-          </a:p>
-        </p:txBody>
-      </p:sp>
-      <p:sp>
-        <p:nvSpPr>
-          <p:cNvPr id="2" name="Rectangle 1">
-            <a:extLst>
-              <a:ext uri="{FF2B5EF4-FFF2-40B4-BE49-F238E27FC236}">
-                <a16:creationId xmlns:a16="http://schemas.microsoft.com/office/drawing/2014/main" id="{01366CD1-9AD1-4E1D-8938-69AD3C58813C}"/>
-              </a:ext>
-            </a:extLst>
-          </p:cNvPr>
-          <p:cNvSpPr>
-            <a:spLocks noGrp="1"/>
-          </p:cNvSpPr>
-          <p:nvPr/>
-        </p:nvSpPr>
-        <p:spPr>
-          <a:xfrm>
-            <a:off x="571500" y="838200"/>
-            <a:ext cx="9715500" cy="323850"/>
+            <a:pPr algn="ctr">
+              <a:defRPr sz="1650" b="1">
+                <a:solidFill>
+                  <a:srgbClr val="0B163F"/>
+                </a:solidFill>
+              </a:defRPr>
+            </a:pPr>
+            <a:r>
+              <a:rPr sz="1650" b="1">
+                <a:solidFill>
+                  <a:srgbClr val="0B163F"/>
+                </a:solidFill>
+              </a:rPr>
+              <a:t>Financial data object</a:t>
+            </a:r>
+            <a:endParaRPr sz="1650" b="1">
+              <a:solidFill>
+                <a:srgbClr val="0B163F"/>
+              </a:solidFill>
+            </a:endParaRPr>
+          </a:p>
+        </p:txBody>
+      </p:sp>
+      <p:sp>
+        <p:nvSpPr>
+          <p:cNvPr id="4" name="Rectangle 3"/>
+          <p:cNvSpPr>
+            <a:spLocks noGrp="1"/>
+          </p:cNvSpPr>
+          <p:nvPr/>
+        </p:nvSpPr>
+        <p:spPr>
+          <a:xfrm>
+            <a:off x="4667250" y="1152525"/>
+            <a:ext cx="2857500" cy="266700"/>
           </a:xfrm>
           <a:prstGeom prst="rect">
             <a:avLst/>
@@ -886,41 +863,40 @@
           <a:bodyPr/>
           <a:lstStyle/>
           <a:p>
-            <a:pPr algn="l">
-              <a:defRPr sz="1350" b="0">
-                <a:solidFill>
-                  <a:srgbClr val="52616B"/>
-                </a:solidFill>
-              </a:defRPr>
-            </a:pPr>
-            <a:r>
-              <a:rPr sz="1350" b="0">
-                <a:solidFill>
-                  <a:srgbClr val="52616B"/>
-                </a:solidFill>
-              </a:rPr>
-              <a:t>Organize finance diffusion papers by the object being generated, then by application and method family.</a:t>
-            </a:r>
-          </a:p>
-        </p:txBody>
-      </p:sp>
-      <p:sp>
-        <p:nvSpPr>
-          <p:cNvPr id="3" name="Rectangle 2">
-            <a:extLst>
-              <a:ext uri="{FF2B5EF4-FFF2-40B4-BE49-F238E27FC236}">
-                <a16:creationId xmlns:a16="http://schemas.microsoft.com/office/drawing/2014/main" id="{81DC4098-8EE7-411B-98F0-53D3102C55B0}"/>
-              </a:ext>
-            </a:extLst>
-          </p:cNvPr>
-          <p:cNvSpPr>
-            <a:spLocks noGrp="1"/>
-          </p:cNvSpPr>
-          <p:nvPr/>
-        </p:nvSpPr>
-        <p:spPr>
-          <a:xfrm>
-            <a:off x="666750" y="1219200"/>
+            <a:pPr algn="ctr">
+              <a:defRPr sz="1650" b="1">
+                <a:solidFill>
+                  <a:srgbClr val="0B163F"/>
+                </a:solidFill>
+              </a:defRPr>
+            </a:pPr>
+            <a:r>
+              <a:rPr sz="1650" b="1">
+                <a:solidFill>
+                  <a:srgbClr val="0B163F"/>
+                </a:solidFill>
+              </a:rPr>
+              <a:t>Application</a:t>
+            </a:r>
+            <a:endParaRPr sz="1650" b="1">
+              <a:solidFill>
+                <a:srgbClr val="0B163F"/>
+              </a:solidFill>
+            </a:endParaRPr>
+          </a:p>
+        </p:txBody>
+      </p:sp>
+      <p:sp>
+        <p:nvSpPr>
+          <p:cNvPr id="5" name="Rectangle 4"/>
+          <p:cNvSpPr>
+            <a:spLocks noGrp="1"/>
+          </p:cNvSpPr>
+          <p:nvPr/>
+        </p:nvSpPr>
+        <p:spPr>
+          <a:xfrm>
+            <a:off x="8667750" y="1152525"/>
             <a:ext cx="2857500" cy="266700"/>
           </a:xfrm>
           <a:prstGeom prst="rect">
@@ -949,120 +925,19 @@
                   <a:srgbClr val="0B163F"/>
                 </a:solidFill>
               </a:rPr>
-              <a:t>Financial data object</a:t>
-            </a:r>
-          </a:p>
-        </p:txBody>
-      </p:sp>
-      <p:sp>
-        <p:nvSpPr>
-          <p:cNvPr id="4" name="Rectangle 3">
-            <a:extLst>
-              <a:ext uri="{FF2B5EF4-FFF2-40B4-BE49-F238E27FC236}">
-                <a16:creationId xmlns:a16="http://schemas.microsoft.com/office/drawing/2014/main" id="{105D8AF0-B734-4DE5-80CC-DF47862C2C86}"/>
-              </a:ext>
-            </a:extLst>
-          </p:cNvPr>
-          <p:cNvSpPr>
-            <a:spLocks noGrp="1"/>
-          </p:cNvSpPr>
-          <p:nvPr/>
-        </p:nvSpPr>
-        <p:spPr>
-          <a:xfrm>
-            <a:off x="4667250" y="1219200"/>
-            <a:ext cx="2857500" cy="266700"/>
-          </a:xfrm>
-          <a:prstGeom prst="rect">
-            <a:avLst/>
-          </a:prstGeom>
-          <a:noFill/>
-          <a:ln w="0">
-            <a:noFill/>
-            <a:prstDash val="solid"/>
-          </a:ln>
-        </p:spPr>
-        <p:txBody>
-          <a:bodyPr/>
-          <a:lstStyle/>
-          <a:p>
-            <a:pPr algn="ctr">
-              <a:defRPr sz="1650" b="1">
-                <a:solidFill>
-                  <a:srgbClr val="0B163F"/>
-                </a:solidFill>
-              </a:defRPr>
-            </a:pPr>
-            <a:r>
-              <a:rPr sz="1650" b="1">
-                <a:solidFill>
-                  <a:srgbClr val="0B163F"/>
-                </a:solidFill>
-              </a:rPr>
-              <a:t>Application</a:t>
-            </a:r>
-          </a:p>
-        </p:txBody>
-      </p:sp>
-      <p:sp>
-        <p:nvSpPr>
-          <p:cNvPr id="5" name="Rectangle 4">
-            <a:extLst>
-              <a:ext uri="{FF2B5EF4-FFF2-40B4-BE49-F238E27FC236}">
-                <a16:creationId xmlns:a16="http://schemas.microsoft.com/office/drawing/2014/main" id="{09CD0436-E9EB-4CC7-980F-4685A0F2777F}"/>
-              </a:ext>
-            </a:extLst>
-          </p:cNvPr>
-          <p:cNvSpPr>
-            <a:spLocks noGrp="1"/>
-          </p:cNvSpPr>
-          <p:nvPr/>
-        </p:nvSpPr>
-        <p:spPr>
-          <a:xfrm>
-            <a:off x="8667750" y="1219200"/>
-            <a:ext cx="2857500" cy="266700"/>
-          </a:xfrm>
-          <a:prstGeom prst="rect">
-            <a:avLst/>
-          </a:prstGeom>
-          <a:noFill/>
-          <a:ln w="0">
-            <a:noFill/>
-            <a:prstDash val="solid"/>
-          </a:ln>
-        </p:spPr>
-        <p:txBody>
-          <a:bodyPr/>
-          <a:lstStyle/>
-          <a:p>
-            <a:pPr algn="ctr">
-              <a:defRPr sz="1650" b="1">
-                <a:solidFill>
-                  <a:srgbClr val="0B163F"/>
-                </a:solidFill>
-              </a:defRPr>
-            </a:pPr>
-            <a:r>
-              <a:rPr sz="1650" b="1">
-                <a:solidFill>
-                  <a:srgbClr val="0B163F"/>
-                </a:solidFill>
-              </a:rPr>
               <a:t>Method family</a:t>
             </a:r>
-          </a:p>
-        </p:txBody>
-      </p:sp>
-      <p:sp>
-        <p:nvSpPr>
-          <p:cNvPr id="6" name="Rounded Rectangle 5">
-            <a:extLst>
-              <a:ext uri="{FF2B5EF4-FFF2-40B4-BE49-F238E27FC236}">
-                <a16:creationId xmlns:a16="http://schemas.microsoft.com/office/drawing/2014/main" id="{DF2D14EE-D04C-4DF7-B00D-B9FE43563FF7}"/>
-              </a:ext>
-            </a:extLst>
-          </p:cNvPr>
+            <a:endParaRPr sz="1650" b="1">
+              <a:solidFill>
+                <a:srgbClr val="0B163F"/>
+              </a:solidFill>
+            </a:endParaRPr>
+          </a:p>
+        </p:txBody>
+      </p:sp>
+      <p:sp>
+        <p:nvSpPr>
+          <p:cNvPr id="6" name="Rounded Rectangle 5"/>
           <p:cNvSpPr>
             <a:spLocks noGrp="1"/>
           </p:cNvSpPr>
@@ -1107,6 +982,11 @@
               </a:rPr>
               <a:t>Financial time series</a:t>
             </a:r>
+            <a:endParaRPr sz="1200" b="1">
+              <a:solidFill>
+                <a:srgbClr val="0B163F"/>
+              </a:solidFill>
+            </a:endParaRPr>
           </a:p>
           <a:p>
             <a:pPr algn="ctr">
@@ -1124,18 +1004,17 @@
               </a:rPr>
               <a:t>Prices, returns, factors, scenarios</a:t>
             </a:r>
-          </a:p>
-        </p:txBody>
-      </p:sp>
-      <p:sp>
-        <p:nvSpPr>
-          <p:cNvPr id="7" name="Rounded Rectangle 6">
-            <a:extLst>
-              <a:ext uri="{FF2B5EF4-FFF2-40B4-BE49-F238E27FC236}">
-                <a16:creationId xmlns:a16="http://schemas.microsoft.com/office/drawing/2014/main" id="{4FC80E80-AF37-4167-967B-AA0618724851}"/>
-              </a:ext>
-            </a:extLst>
-          </p:cNvPr>
+            <a:endParaRPr sz="1200" b="1">
+              <a:solidFill>
+                <a:srgbClr val="0B163F"/>
+              </a:solidFill>
+            </a:endParaRPr>
+          </a:p>
+        </p:txBody>
+      </p:sp>
+      <p:sp>
+        <p:nvSpPr>
+          <p:cNvPr id="7" name="Rounded Rectangle 6"/>
           <p:cNvSpPr>
             <a:spLocks noGrp="1"/>
           </p:cNvSpPr>
@@ -1180,6 +1059,11 @@
               </a:rPr>
               <a:t>Limit order books</a:t>
             </a:r>
+            <a:endParaRPr sz="1200" b="1">
+              <a:solidFill>
+                <a:srgbClr val="0B163F"/>
+              </a:solidFill>
+            </a:endParaRPr>
           </a:p>
           <a:p>
             <a:pPr algn="ctr">
@@ -1190,25 +1074,41 @@
               </a:defRPr>
             </a:pPr>
             <a:r>
+              <a:rPr lang="en-US" sz="1200" b="1">
+                <a:solidFill>
+                  <a:srgbClr val="0B163F"/>
+                </a:solidFill>
+              </a:rPr>
+              <a:t>O</a:t>
+            </a:r>
+            <a:r>
               <a:rPr sz="1200" b="1">
                 <a:solidFill>
                   <a:srgbClr val="0B163F"/>
                 </a:solidFill>
               </a:rPr>
-              <a:t>Snapshots, order flow, volume</a:t>
-            </a:r>
-          </a:p>
-        </p:txBody>
-      </p:sp>
-      <p:sp>
-        <p:nvSpPr>
-          <p:cNvPr id="8" name="Rounded Rectangle 7">
-            <a:extLst>
-              <a:ext uri="{FF2B5EF4-FFF2-40B4-BE49-F238E27FC236}">
-                <a16:creationId xmlns:a16="http://schemas.microsoft.com/office/drawing/2014/main" id="{261127FD-3146-4B57-A124-D3D77189E881}"/>
-              </a:ext>
-            </a:extLst>
-          </p:cNvPr>
+              <a:t>rder flow</a:t>
+            </a:r>
+            <a:r>
+              <a:rPr lang="en-US" sz="1200" b="1">
+                <a:solidFill>
+                  <a:srgbClr val="0B163F"/>
+                </a:solidFill>
+              </a:rPr>
+              <a:t>, snapshots</a:t>
+            </a:r>
+            <a:endParaRPr lang="en-US" sz="1200" b="1">
+              <a:solidFill>
+                <a:srgbClr val="0B163F"/>
+              </a:solidFill>
+              <a:ea typeface="宋体" panose="02010600030101010101" pitchFamily="2" charset="-122"/>
+            </a:endParaRPr>
+          </a:p>
+        </p:txBody>
+      </p:sp>
+      <p:sp>
+        <p:nvSpPr>
+          <p:cNvPr id="8" name="Rounded Rectangle 7"/>
           <p:cNvSpPr>
             <a:spLocks noGrp="1"/>
           </p:cNvSpPr>
@@ -1253,6 +1153,11 @@
               </a:rPr>
               <a:t>Tabular data</a:t>
             </a:r>
+            <a:endParaRPr sz="1200" b="1">
+              <a:solidFill>
+                <a:srgbClr val="0B163F"/>
+              </a:solidFill>
+            </a:endParaRPr>
           </a:p>
           <a:p>
             <a:pPr algn="ctr">
@@ -1268,20 +1173,19 @@
                   <a:srgbClr val="0B163F"/>
                 </a:solidFill>
               </a:rPr>
-              <a:t>Credit, payment, customer, fraud rows</a:t>
-            </a:r>
-          </a:p>
-        </p:txBody>
-      </p:sp>
-      <p:sp>
-        <p:nvSpPr>
-          <p:cNvPr id="9" name="Rounded Rectangle 8">
-            <a:extLst>
-              <a:ext uri="{FF2B5EF4-FFF2-40B4-BE49-F238E27FC236}">
-                <a16:creationId xmlns:a16="http://schemas.microsoft.com/office/drawing/2014/main" id="{B0BC166F-EF02-4AE4-BE23-76E14C311C1F}"/>
-              </a:ext>
-            </a:extLst>
-          </p:cNvPr>
+              <a:t>Credit, payment, customer, fraud</a:t>
+            </a:r>
+            <a:endParaRPr sz="1200" b="1">
+              <a:solidFill>
+                <a:srgbClr val="0B163F"/>
+              </a:solidFill>
+            </a:endParaRPr>
+          </a:p>
+        </p:txBody>
+      </p:sp>
+      <p:sp>
+        <p:nvSpPr>
+          <p:cNvPr id="9" name="Rounded Rectangle 8"/>
           <p:cNvSpPr>
             <a:spLocks noGrp="1"/>
           </p:cNvSpPr>
@@ -1326,6 +1230,11 @@
               </a:rPr>
               <a:t>Structured data</a:t>
             </a:r>
+            <a:endParaRPr sz="1200" b="1">
+              <a:solidFill>
+                <a:srgbClr val="0B163F"/>
+              </a:solidFill>
+            </a:endParaRPr>
           </a:p>
           <a:p>
             <a:pPr algn="ctr">
@@ -1341,20 +1250,19 @@
                   <a:srgbClr val="0B163F"/>
                 </a:solidFill>
               </a:rPr>
-              <a:t>Matrices, surfaces, curves, pricing paths</a:t>
-            </a:r>
-          </a:p>
-        </p:txBody>
-      </p:sp>
-      <p:sp>
-        <p:nvSpPr>
-          <p:cNvPr id="10" name="Rounded Rectangle 9">
-            <a:extLst>
-              <a:ext uri="{FF2B5EF4-FFF2-40B4-BE49-F238E27FC236}">
-                <a16:creationId xmlns:a16="http://schemas.microsoft.com/office/drawing/2014/main" id="{DC1D1779-030E-4D33-B7DF-960D145D5650}"/>
-              </a:ext>
-            </a:extLst>
-          </p:cNvPr>
+              <a:t>Matrices, surfaces, curves</a:t>
+            </a:r>
+            <a:endParaRPr sz="1200" b="1">
+              <a:solidFill>
+                <a:srgbClr val="0B163F"/>
+              </a:solidFill>
+            </a:endParaRPr>
+          </a:p>
+        </p:txBody>
+      </p:sp>
+      <p:sp>
+        <p:nvSpPr>
+          <p:cNvPr id="10" name="Rounded Rectangle 9"/>
           <p:cNvSpPr>
             <a:spLocks noGrp="1"/>
           </p:cNvSpPr>
@@ -1399,6 +1307,11 @@
               </a:rPr>
               <a:t>Generation</a:t>
             </a:r>
+            <a:endParaRPr sz="1200" b="1">
+              <a:solidFill>
+                <a:srgbClr val="0B163F"/>
+              </a:solidFill>
+            </a:endParaRPr>
           </a:p>
           <a:p>
             <a:pPr algn="ctr">
@@ -1416,18 +1329,17 @@
               </a:rPr>
               <a:t>Synthetic data and market simulation</a:t>
             </a:r>
-          </a:p>
-        </p:txBody>
-      </p:sp>
-      <p:sp>
-        <p:nvSpPr>
-          <p:cNvPr id="11" name="Rounded Rectangle 10">
-            <a:extLst>
-              <a:ext uri="{FF2B5EF4-FFF2-40B4-BE49-F238E27FC236}">
-                <a16:creationId xmlns:a16="http://schemas.microsoft.com/office/drawing/2014/main" id="{D0AB857B-929A-4792-9B7F-6CD846E3BAB5}"/>
-              </a:ext>
-            </a:extLst>
-          </p:cNvPr>
+            <a:endParaRPr sz="1200" b="1">
+              <a:solidFill>
+                <a:srgbClr val="0B163F"/>
+              </a:solidFill>
+            </a:endParaRPr>
+          </a:p>
+        </p:txBody>
+      </p:sp>
+      <p:sp>
+        <p:nvSpPr>
+          <p:cNvPr id="11" name="Rounded Rectangle 10"/>
           <p:cNvSpPr>
             <a:spLocks noGrp="1"/>
           </p:cNvSpPr>
@@ -1472,6 +1384,11 @@
               </a:rPr>
               <a:t>Prediction and trading</a:t>
             </a:r>
+            <a:endParaRPr sz="1200" b="1">
+              <a:solidFill>
+                <a:srgbClr val="0B163F"/>
+              </a:solidFill>
+            </a:endParaRPr>
           </a:p>
           <a:p>
             <a:pPr algn="ctr">
@@ -1489,18 +1406,17 @@
               </a:rPr>
               <a:t>Forecasts, signals, policies</a:t>
             </a:r>
-          </a:p>
-        </p:txBody>
-      </p:sp>
-      <p:sp>
-        <p:nvSpPr>
-          <p:cNvPr id="12" name="Rounded Rectangle 11">
-            <a:extLst>
-              <a:ext uri="{FF2B5EF4-FFF2-40B4-BE49-F238E27FC236}">
-                <a16:creationId xmlns:a16="http://schemas.microsoft.com/office/drawing/2014/main" id="{5C7256DE-E7E6-4AA3-BCFC-4A0FC6517F5B}"/>
-              </a:ext>
-            </a:extLst>
-          </p:cNvPr>
+            <a:endParaRPr sz="1200" b="1">
+              <a:solidFill>
+                <a:srgbClr val="0B163F"/>
+              </a:solidFill>
+            </a:endParaRPr>
+          </a:p>
+        </p:txBody>
+      </p:sp>
+      <p:sp>
+        <p:nvSpPr>
+          <p:cNvPr id="12" name="Rounded Rectangle 11"/>
           <p:cNvSpPr>
             <a:spLocks noGrp="1"/>
           </p:cNvSpPr>
@@ -1545,6 +1461,11 @@
               </a:rPr>
               <a:t>Risk and pricing</a:t>
             </a:r>
+            <a:endParaRPr sz="1200" b="1">
+              <a:solidFill>
+                <a:srgbClr val="0B163F"/>
+              </a:solidFill>
+            </a:endParaRPr>
           </a:p>
           <a:p>
             <a:pPr algn="ctr">
@@ -1562,18 +1483,17 @@
               </a:rPr>
               <a:t>Stress paths, valuation, scenarios</a:t>
             </a:r>
-          </a:p>
-        </p:txBody>
-      </p:sp>
-      <p:sp>
-        <p:nvSpPr>
-          <p:cNvPr id="13" name="Rounded Rectangle 12">
-            <a:extLst>
-              <a:ext uri="{FF2B5EF4-FFF2-40B4-BE49-F238E27FC236}">
-                <a16:creationId xmlns:a16="http://schemas.microsoft.com/office/drawing/2014/main" id="{4B4849F2-C6A7-446E-B0F9-4D53658D6BF1}"/>
-              </a:ext>
-            </a:extLst>
-          </p:cNvPr>
+            <a:endParaRPr sz="1200" b="1">
+              <a:solidFill>
+                <a:srgbClr val="0B163F"/>
+              </a:solidFill>
+            </a:endParaRPr>
+          </a:p>
+        </p:txBody>
+      </p:sp>
+      <p:sp>
+        <p:nvSpPr>
+          <p:cNvPr id="13" name="Rounded Rectangle 12"/>
           <p:cNvSpPr>
             <a:spLocks noGrp="1"/>
           </p:cNvSpPr>
@@ -1618,6 +1538,11 @@
               </a:rPr>
               <a:t>Privacy and trust</a:t>
             </a:r>
+            <a:endParaRPr sz="1200" b="1">
+              <a:solidFill>
+                <a:srgbClr val="0B163F"/>
+              </a:solidFill>
+            </a:endParaRPr>
           </a:p>
           <a:p>
             <a:pPr algn="ctr">
@@ -1635,18 +1560,17 @@
               </a:rPr>
               <a:t>Utility, leakage, constraints</a:t>
             </a:r>
-          </a:p>
-        </p:txBody>
-      </p:sp>
-      <p:sp>
-        <p:nvSpPr>
-          <p:cNvPr id="14" name="Rounded Rectangle 13">
-            <a:extLst>
-              <a:ext uri="{FF2B5EF4-FFF2-40B4-BE49-F238E27FC236}">
-                <a16:creationId xmlns:a16="http://schemas.microsoft.com/office/drawing/2014/main" id="{8FA1D97C-3B56-44FE-AC65-3586CA227148}"/>
-              </a:ext>
-            </a:extLst>
-          </p:cNvPr>
+            <a:endParaRPr sz="1200" b="1">
+              <a:solidFill>
+                <a:srgbClr val="0B163F"/>
+              </a:solidFill>
+            </a:endParaRPr>
+          </a:p>
+        </p:txBody>
+      </p:sp>
+      <p:sp>
+        <p:nvSpPr>
+          <p:cNvPr id="14" name="Rounded Rectangle 13"/>
           <p:cNvSpPr>
             <a:spLocks noGrp="1"/>
           </p:cNvSpPr>
@@ -1691,6 +1615,11 @@
               </a:rPr>
               <a:t>DDPM / score-SDE</a:t>
             </a:r>
+            <a:endParaRPr sz="1200" b="1">
+              <a:solidFill>
+                <a:srgbClr val="0B163F"/>
+              </a:solidFill>
+            </a:endParaRPr>
           </a:p>
           <a:p>
             <a:pPr algn="ctr">
@@ -1708,18 +1637,17 @@
               </a:rPr>
               <a:t>Denoising and reverse-time sampling</a:t>
             </a:r>
-          </a:p>
-        </p:txBody>
-      </p:sp>
-      <p:sp>
-        <p:nvSpPr>
-          <p:cNvPr id="15" name="Rounded Rectangle 14">
-            <a:extLst>
-              <a:ext uri="{FF2B5EF4-FFF2-40B4-BE49-F238E27FC236}">
-                <a16:creationId xmlns:a16="http://schemas.microsoft.com/office/drawing/2014/main" id="{DDAF0EF0-54CE-463A-85D6-3DB31B53DA4F}"/>
-              </a:ext>
-            </a:extLst>
-          </p:cNvPr>
+            <a:endParaRPr sz="1200" b="1">
+              <a:solidFill>
+                <a:srgbClr val="0B163F"/>
+              </a:solidFill>
+            </a:endParaRPr>
+          </a:p>
+        </p:txBody>
+      </p:sp>
+      <p:sp>
+        <p:nvSpPr>
+          <p:cNvPr id="15" name="Rounded Rectangle 14"/>
           <p:cNvSpPr>
             <a:spLocks noGrp="1"/>
           </p:cNvSpPr>
@@ -1764,6 +1692,11 @@
               </a:rPr>
               <a:t>Conditional guidance</a:t>
             </a:r>
+            <a:endParaRPr sz="1200" b="1">
+              <a:solidFill>
+                <a:srgbClr val="0B163F"/>
+              </a:solidFill>
+            </a:endParaRPr>
           </a:p>
           <a:p>
             <a:pPr algn="ctr">
@@ -1781,18 +1714,17 @@
               </a:rPr>
               <a:t>Controls, regimes, masks, constraints</a:t>
             </a:r>
-          </a:p>
-        </p:txBody>
-      </p:sp>
-      <p:sp>
-        <p:nvSpPr>
-          <p:cNvPr id="16" name="Rounded Rectangle 15">
-            <a:extLst>
-              <a:ext uri="{FF2B5EF4-FFF2-40B4-BE49-F238E27FC236}">
-                <a16:creationId xmlns:a16="http://schemas.microsoft.com/office/drawing/2014/main" id="{E984C4B4-366E-4987-AD44-5268AFF7C5B7}"/>
-              </a:ext>
-            </a:extLst>
-          </p:cNvPr>
+            <a:endParaRPr sz="1200" b="1">
+              <a:solidFill>
+                <a:srgbClr val="0B163F"/>
+              </a:solidFill>
+            </a:endParaRPr>
+          </a:p>
+        </p:txBody>
+      </p:sp>
+      <p:sp>
+        <p:nvSpPr>
+          <p:cNvPr id="16" name="Rounded Rectangle 15"/>
           <p:cNvSpPr>
             <a:spLocks noGrp="1"/>
           </p:cNvSpPr>
@@ -1837,6 +1769,11 @@
               </a:rPr>
               <a:t>Latent / tabular diffusion</a:t>
             </a:r>
+            <a:endParaRPr sz="1200" b="1">
+              <a:solidFill>
+                <a:srgbClr val="0B163F"/>
+              </a:solidFill>
+            </a:endParaRPr>
           </a:p>
           <a:p>
             <a:pPr algn="ctr">
@@ -1854,18 +1791,17 @@
               </a:rPr>
               <a:t>Mixed fields and compact spaces</a:t>
             </a:r>
-          </a:p>
-        </p:txBody>
-      </p:sp>
-      <p:sp>
-        <p:nvSpPr>
-          <p:cNvPr id="17" name="Rounded Rectangle 16">
-            <a:extLst>
-              <a:ext uri="{FF2B5EF4-FFF2-40B4-BE49-F238E27FC236}">
-                <a16:creationId xmlns:a16="http://schemas.microsoft.com/office/drawing/2014/main" id="{91F47FC6-56C4-4C02-BCF4-733E10010595}"/>
-              </a:ext>
-            </a:extLst>
-          </p:cNvPr>
+            <a:endParaRPr sz="1200" b="1">
+              <a:solidFill>
+                <a:srgbClr val="0B163F"/>
+              </a:solidFill>
+            </a:endParaRPr>
+          </a:p>
+        </p:txBody>
+      </p:sp>
+      <p:sp>
+        <p:nvSpPr>
+          <p:cNvPr id="17" name="Rounded Rectangle 16"/>
           <p:cNvSpPr>
             <a:spLocks noGrp="1"/>
           </p:cNvSpPr>
@@ -1910,6 +1846,11 @@
               </a:rPr>
               <a:t>Flow matching</a:t>
             </a:r>
+            <a:endParaRPr sz="1200" b="1">
+              <a:solidFill>
+                <a:srgbClr val="0B163F"/>
+              </a:solidFill>
+            </a:endParaRPr>
           </a:p>
           <a:p>
             <a:pPr algn="ctr">
@@ -1927,6 +1868,11 @@
               </a:rPr>
               <a:t>Fast transport and decision loops</a:t>
             </a:r>
+            <a:endParaRPr sz="1200" b="1">
+              <a:solidFill>
+                <a:srgbClr val="0B163F"/>
+              </a:solidFill>
+            </a:endParaRPr>
           </a:p>
         </p:txBody>
       </p:sp>
@@ -2130,97 +2076,7 @@
           </a:ln>
         </p:spPr>
       </p:cxnSp>
-      <p:sp>
-        <p:nvSpPr>
-          <p:cNvPr id="26" name="Rectangle 25">
-            <a:extLst>
-              <a:ext uri="{FF2B5EF4-FFF2-40B4-BE49-F238E27FC236}">
-                <a16:creationId xmlns:a16="http://schemas.microsoft.com/office/drawing/2014/main" id="{105CDC78-5775-48ED-97E6-933F3FE33F63}"/>
-              </a:ext>
-            </a:extLst>
-          </p:cNvPr>
-          <p:cNvSpPr>
-            <a:spLocks noGrp="1"/>
-          </p:cNvSpPr>
-          <p:nvPr/>
-        </p:nvSpPr>
-        <p:spPr>
-          <a:xfrm>
-            <a:off x="666750" y="6191250"/>
-            <a:ext cx="7239000" cy="228600"/>
-          </a:xfrm>
-          <a:prstGeom prst="rect">
-            <a:avLst/>
-          </a:prstGeom>
-          <a:noFill/>
-          <a:ln w="0">
-            <a:noFill/>
-            <a:prstDash val="solid"/>
-          </a:ln>
-        </p:spPr>
-        <p:txBody>
-          <a:bodyPr/>
-          <a:lstStyle/>
-          <a:p>
-            <a:pPr algn="l">
-              <a:defRPr sz="1050" b="0">
-                <a:solidFill>
-                  <a:srgbClr val="52616B"/>
-                </a:solidFill>
-              </a:defRPr>
-            </a:pPr>
-            <a:r>
-              <a:rPr sz="1050" b="0">
-                <a:solidFill>
-                  <a:srgbClr val="52616B"/>
-                </a:solidFill>
-              </a:rPr>
-              <a:t>Editable reconstruction of the manuscript taxonomy figure</a:t>
-            </a:r>
-          </a:p>
-        </p:txBody>
-      </p:sp>
-      <p:sp>
-        <p:nvSpPr>
-          <p:cNvPr id="18" name="TextBox 17">
-            <a:extLst>
-              <a:ext uri="{FF2B5EF4-FFF2-40B4-BE49-F238E27FC236}">
-                <a16:creationId xmlns:a16="http://schemas.microsoft.com/office/drawing/2014/main" id="{C1189149-07AA-A72C-35E5-207612113708}"/>
-              </a:ext>
-            </a:extLst>
-          </p:cNvPr>
-          <p:cNvSpPr txBox="1"/>
-          <p:nvPr/>
-        </p:nvSpPr>
-        <p:spPr>
-          <a:xfrm>
-            <a:off x="2197100" y="5816600"/>
-            <a:ext cx="312906" cy="369332"/>
-          </a:xfrm>
-          <a:prstGeom prst="rect">
-            <a:avLst/>
-          </a:prstGeom>
-          <a:noFill/>
-        </p:spPr>
-        <p:txBody>
-          <a:bodyPr wrap="none" rtlCol="0">
-            <a:spAutoFit/>
-          </a:bodyPr>
-          <a:lstStyle/>
-          <a:p>
-            <a:r>
-              <a:rPr lang="en-US"/>
-              <a:t>Jj</a:t>
-            </a:r>
-          </a:p>
-        </p:txBody>
-      </p:sp>
     </p:spTree>
-    <p:extLst>
-      <p:ext uri="{BB962C8B-B14F-4D97-AF65-F5344CB8AC3E}">
-        <p14:creationId xmlns:p14="http://schemas.microsoft.com/office/powerpoint/2010/main" val="36043908"/>
-      </p:ext>
-    </p:extLst>
   </p:cSld>
   <p:clrMapOvr>
     <a:masterClrMapping/>
@@ -2255,13 +2111,7 @@
       </p:grpSpPr>
       <p:sp>
         <p:nvSpPr>
-          <p:cNvPr id="46" name="Rectangle 45">
-            <a:extLst>
-              <a:ext uri="{FF2B5EF4-FFF2-40B4-BE49-F238E27FC236}">
-                <a16:creationId xmlns:a16="http://schemas.microsoft.com/office/drawing/2014/main" id="{B3AB0667-7390-4538-B864-F10B7578D1CC}"/>
-              </a:ext>
-            </a:extLst>
-          </p:cNvPr>
+          <p:cNvPr id="46" name="Rectangle 45"/>
           <p:cNvSpPr>
             <a:spLocks noGrp="1"/>
           </p:cNvSpPr>
@@ -2300,18 +2150,17 @@
               </a:rPr>
               <a:t>Figure 2. Corpus coverage map</a:t>
             </a:r>
-          </a:p>
-        </p:txBody>
-      </p:sp>
-      <p:sp>
-        <p:nvSpPr>
-          <p:cNvPr id="2" name="Rectangle 1">
-            <a:extLst>
-              <a:ext uri="{FF2B5EF4-FFF2-40B4-BE49-F238E27FC236}">
-                <a16:creationId xmlns:a16="http://schemas.microsoft.com/office/drawing/2014/main" id="{0BF87926-66D6-489F-A2E9-204B18D57ED9}"/>
-              </a:ext>
-            </a:extLst>
-          </p:cNvPr>
+            <a:endParaRPr sz="2850" b="1">
+              <a:solidFill>
+                <a:srgbClr val="0B163F"/>
+              </a:solidFill>
+            </a:endParaRPr>
+          </a:p>
+        </p:txBody>
+      </p:sp>
+      <p:sp>
+        <p:nvSpPr>
+          <p:cNvPr id="2" name="Rectangle 1"/>
           <p:cNvSpPr>
             <a:spLocks noGrp="1"/>
           </p:cNvSpPr>
@@ -2350,18 +2199,17 @@
               </a:rPr>
               <a:t>Bubble size encodes paper count; blue rings indicate cells with public implementations.</a:t>
             </a:r>
-          </a:p>
-        </p:txBody>
-      </p:sp>
-      <p:sp>
-        <p:nvSpPr>
-          <p:cNvPr id="3" name="Rectangle 2">
-            <a:extLst>
-              <a:ext uri="{FF2B5EF4-FFF2-40B4-BE49-F238E27FC236}">
-                <a16:creationId xmlns:a16="http://schemas.microsoft.com/office/drawing/2014/main" id="{C2012A8A-DF17-45A5-A2FD-90D4A87E1CF4}"/>
-              </a:ext>
-            </a:extLst>
-          </p:cNvPr>
+            <a:endParaRPr sz="1350" b="0">
+              <a:solidFill>
+                <a:srgbClr val="52616B"/>
+              </a:solidFill>
+            </a:endParaRPr>
+          </a:p>
+        </p:txBody>
+      </p:sp>
+      <p:sp>
+        <p:nvSpPr>
+          <p:cNvPr id="3" name="Rectangle 2"/>
           <p:cNvSpPr>
             <a:spLocks noGrp="1"/>
           </p:cNvSpPr>
@@ -2400,18 +2248,17 @@
               </a:rPr>
               <a:t>Generation</a:t>
             </a:r>
-          </a:p>
-        </p:txBody>
-      </p:sp>
-      <p:sp>
-        <p:nvSpPr>
-          <p:cNvPr id="4" name="Rectangle 3">
-            <a:extLst>
-              <a:ext uri="{FF2B5EF4-FFF2-40B4-BE49-F238E27FC236}">
-                <a16:creationId xmlns:a16="http://schemas.microsoft.com/office/drawing/2014/main" id="{25D7A906-5097-4562-9852-771677AFAF15}"/>
-              </a:ext>
-            </a:extLst>
-          </p:cNvPr>
+            <a:endParaRPr sz="1500" b="1">
+              <a:solidFill>
+                <a:srgbClr val="0B163F"/>
+              </a:solidFill>
+            </a:endParaRPr>
+          </a:p>
+        </p:txBody>
+      </p:sp>
+      <p:sp>
+        <p:nvSpPr>
+          <p:cNvPr id="4" name="Rectangle 3"/>
           <p:cNvSpPr>
             <a:spLocks noGrp="1"/>
           </p:cNvSpPr>
@@ -2450,18 +2297,17 @@
               </a:rPr>
               <a:t>Prediction / trading</a:t>
             </a:r>
-          </a:p>
-        </p:txBody>
-      </p:sp>
-      <p:sp>
-        <p:nvSpPr>
-          <p:cNvPr id="5" name="Rectangle 4">
-            <a:extLst>
-              <a:ext uri="{FF2B5EF4-FFF2-40B4-BE49-F238E27FC236}">
-                <a16:creationId xmlns:a16="http://schemas.microsoft.com/office/drawing/2014/main" id="{74063BE1-01E9-4E8C-880E-34C85B2B48B8}"/>
-              </a:ext>
-            </a:extLst>
-          </p:cNvPr>
+            <a:endParaRPr sz="1500" b="1">
+              <a:solidFill>
+                <a:srgbClr val="0B163F"/>
+              </a:solidFill>
+            </a:endParaRPr>
+          </a:p>
+        </p:txBody>
+      </p:sp>
+      <p:sp>
+        <p:nvSpPr>
+          <p:cNvPr id="5" name="Rectangle 4"/>
           <p:cNvSpPr>
             <a:spLocks noGrp="1"/>
           </p:cNvSpPr>
@@ -2500,18 +2346,17 @@
               </a:rPr>
               <a:t>Risk / pricing</a:t>
             </a:r>
-          </a:p>
-        </p:txBody>
-      </p:sp>
-      <p:sp>
-        <p:nvSpPr>
-          <p:cNvPr id="6" name="Rectangle 5">
-            <a:extLst>
-              <a:ext uri="{FF2B5EF4-FFF2-40B4-BE49-F238E27FC236}">
-                <a16:creationId xmlns:a16="http://schemas.microsoft.com/office/drawing/2014/main" id="{94DBBFA8-19E9-44A2-B10B-8F743C4E2398}"/>
-              </a:ext>
-            </a:extLst>
-          </p:cNvPr>
+            <a:endParaRPr sz="1500" b="1">
+              <a:solidFill>
+                <a:srgbClr val="0B163F"/>
+              </a:solidFill>
+            </a:endParaRPr>
+          </a:p>
+        </p:txBody>
+      </p:sp>
+      <p:sp>
+        <p:nvSpPr>
+          <p:cNvPr id="6" name="Rectangle 5"/>
           <p:cNvSpPr>
             <a:spLocks noGrp="1"/>
           </p:cNvSpPr>
@@ -2550,18 +2395,17 @@
               </a:rPr>
               <a:t>Privacy / trust</a:t>
             </a:r>
-          </a:p>
-        </p:txBody>
-      </p:sp>
-      <p:sp>
-        <p:nvSpPr>
-          <p:cNvPr id="7" name="Rectangle 6">
-            <a:extLst>
-              <a:ext uri="{FF2B5EF4-FFF2-40B4-BE49-F238E27FC236}">
-                <a16:creationId xmlns:a16="http://schemas.microsoft.com/office/drawing/2014/main" id="{4F4F8FB9-E755-47DF-A603-BC9FB5C93D10}"/>
-              </a:ext>
-            </a:extLst>
-          </p:cNvPr>
+            <a:endParaRPr sz="1500" b="1">
+              <a:solidFill>
+                <a:srgbClr val="0B163F"/>
+              </a:solidFill>
+            </a:endParaRPr>
+          </a:p>
+        </p:txBody>
+      </p:sp>
+      <p:sp>
+        <p:nvSpPr>
+          <p:cNvPr id="7" name="Rectangle 6"/>
           <p:cNvSpPr>
             <a:spLocks noGrp="1"/>
           </p:cNvSpPr>
@@ -2600,18 +2444,17 @@
               </a:rPr>
               <a:t>Financial time series</a:t>
             </a:r>
-          </a:p>
-        </p:txBody>
-      </p:sp>
-      <p:sp>
-        <p:nvSpPr>
-          <p:cNvPr id="8" name="Rectangle 7">
-            <a:extLst>
-              <a:ext uri="{FF2B5EF4-FFF2-40B4-BE49-F238E27FC236}">
-                <a16:creationId xmlns:a16="http://schemas.microsoft.com/office/drawing/2014/main" id="{1FBA95B6-C1BE-460C-925E-C5FEE9746CDC}"/>
-              </a:ext>
-            </a:extLst>
-          </p:cNvPr>
+            <a:endParaRPr sz="1500" b="1">
+              <a:solidFill>
+                <a:srgbClr val="0B163F"/>
+              </a:solidFill>
+            </a:endParaRPr>
+          </a:p>
+        </p:txBody>
+      </p:sp>
+      <p:sp>
+        <p:nvSpPr>
+          <p:cNvPr id="8" name="Rectangle 7"/>
           <p:cNvSpPr>
             <a:spLocks noGrp="1"/>
           </p:cNvSpPr>
@@ -2650,18 +2493,17 @@
               </a:rPr>
               <a:t>Limit order books</a:t>
             </a:r>
-          </a:p>
-        </p:txBody>
-      </p:sp>
-      <p:sp>
-        <p:nvSpPr>
-          <p:cNvPr id="9" name="Rectangle 8">
-            <a:extLst>
-              <a:ext uri="{FF2B5EF4-FFF2-40B4-BE49-F238E27FC236}">
-                <a16:creationId xmlns:a16="http://schemas.microsoft.com/office/drawing/2014/main" id="{219B00C6-B5DA-426F-AC70-94685F7F8E9E}"/>
-              </a:ext>
-            </a:extLst>
-          </p:cNvPr>
+            <a:endParaRPr sz="1500" b="1">
+              <a:solidFill>
+                <a:srgbClr val="0B163F"/>
+              </a:solidFill>
+            </a:endParaRPr>
+          </a:p>
+        </p:txBody>
+      </p:sp>
+      <p:sp>
+        <p:nvSpPr>
+          <p:cNvPr id="9" name="Rectangle 8"/>
           <p:cNvSpPr>
             <a:spLocks noGrp="1"/>
           </p:cNvSpPr>
@@ -2700,18 +2542,17 @@
               </a:rPr>
               <a:t>Tabular data</a:t>
             </a:r>
-          </a:p>
-        </p:txBody>
-      </p:sp>
-      <p:sp>
-        <p:nvSpPr>
-          <p:cNvPr id="10" name="Rectangle 9">
-            <a:extLst>
-              <a:ext uri="{FF2B5EF4-FFF2-40B4-BE49-F238E27FC236}">
-                <a16:creationId xmlns:a16="http://schemas.microsoft.com/office/drawing/2014/main" id="{D2B752EE-DD51-4310-9BB8-BCD9BF7D3EEB}"/>
-              </a:ext>
-            </a:extLst>
-          </p:cNvPr>
+            <a:endParaRPr sz="1500" b="1">
+              <a:solidFill>
+                <a:srgbClr val="0B163F"/>
+              </a:solidFill>
+            </a:endParaRPr>
+          </a:p>
+        </p:txBody>
+      </p:sp>
+      <p:sp>
+        <p:nvSpPr>
+          <p:cNvPr id="10" name="Rectangle 9"/>
           <p:cNvSpPr>
             <a:spLocks noGrp="1"/>
           </p:cNvSpPr>
@@ -2750,18 +2591,17 @@
               </a:rPr>
               <a:t>Structured data</a:t>
             </a:r>
-          </a:p>
-        </p:txBody>
-      </p:sp>
-      <p:sp>
-        <p:nvSpPr>
-          <p:cNvPr id="11" name="Rectangle 10">
-            <a:extLst>
-              <a:ext uri="{FF2B5EF4-FFF2-40B4-BE49-F238E27FC236}">
-                <a16:creationId xmlns:a16="http://schemas.microsoft.com/office/drawing/2014/main" id="{DA7AB203-BB86-40F3-9F19-738E876D16EE}"/>
-              </a:ext>
-            </a:extLst>
-          </p:cNvPr>
+            <a:endParaRPr sz="1500" b="1">
+              <a:solidFill>
+                <a:srgbClr val="0B163F"/>
+              </a:solidFill>
+            </a:endParaRPr>
+          </a:p>
+        </p:txBody>
+      </p:sp>
+      <p:sp>
+        <p:nvSpPr>
+          <p:cNvPr id="11" name="Rectangle 10"/>
           <p:cNvSpPr>
             <a:spLocks noGrp="1"/>
           </p:cNvSpPr>
@@ -2795,13 +2635,7 @@
       </p:sp>
       <p:sp>
         <p:nvSpPr>
-          <p:cNvPr id="12" name="Oval 11">
-            <a:extLst>
-              <a:ext uri="{FF2B5EF4-FFF2-40B4-BE49-F238E27FC236}">
-                <a16:creationId xmlns:a16="http://schemas.microsoft.com/office/drawing/2014/main" id="{3BBBCC58-CF0C-4EEA-892A-87C692DF07FB}"/>
-              </a:ext>
-            </a:extLst>
-          </p:cNvPr>
+          <p:cNvPr id="12" name="Oval 11"/>
           <p:cNvSpPr>
             <a:spLocks noGrp="1"/>
           </p:cNvSpPr>
@@ -2833,13 +2667,7 @@
       </p:sp>
       <p:sp>
         <p:nvSpPr>
-          <p:cNvPr id="13" name="Oval 12">
-            <a:extLst>
-              <a:ext uri="{FF2B5EF4-FFF2-40B4-BE49-F238E27FC236}">
-                <a16:creationId xmlns:a16="http://schemas.microsoft.com/office/drawing/2014/main" id="{86B64EBA-55AF-4155-A61E-BDA1FD6810A2}"/>
-              </a:ext>
-            </a:extLst>
-          </p:cNvPr>
+          <p:cNvPr id="13" name="Oval 12"/>
           <p:cNvSpPr>
             <a:spLocks noGrp="1"/>
           </p:cNvSpPr>
@@ -2866,32 +2694,31 @@
           <a:lstStyle/>
           <a:p>
             <a:pPr algn="ctr">
-              <a:defRPr sz="2598" b="1">
+              <a:defRPr sz="2600" b="1">
                 <a:solidFill>
                   <a:srgbClr val="FFFFFF"/>
                 </a:solidFill>
               </a:defRPr>
             </a:pPr>
             <a:r>
-              <a:rPr sz="2598" b="1">
+              <a:rPr sz="2600" b="1">
                 <a:solidFill>
                   <a:srgbClr val="FFFFFF"/>
                 </a:solidFill>
               </a:rPr>
               <a:t>6</a:t>
             </a:r>
-          </a:p>
-        </p:txBody>
-      </p:sp>
-      <p:sp>
-        <p:nvSpPr>
-          <p:cNvPr id="14" name="Rectangle 13">
-            <a:extLst>
-              <a:ext uri="{FF2B5EF4-FFF2-40B4-BE49-F238E27FC236}">
-                <a16:creationId xmlns:a16="http://schemas.microsoft.com/office/drawing/2014/main" id="{6440D2CE-4B20-472D-A05B-99A82369E027}"/>
-              </a:ext>
-            </a:extLst>
-          </p:cNvPr>
+            <a:endParaRPr sz="2600" b="1">
+              <a:solidFill>
+                <a:srgbClr val="FFFFFF"/>
+              </a:solidFill>
+            </a:endParaRPr>
+          </a:p>
+        </p:txBody>
+      </p:sp>
+      <p:sp>
+        <p:nvSpPr>
+          <p:cNvPr id="14" name="Rectangle 13"/>
           <p:cNvSpPr>
             <a:spLocks noGrp="1"/>
           </p:cNvSpPr>
@@ -2925,13 +2752,7 @@
       </p:sp>
       <p:sp>
         <p:nvSpPr>
-          <p:cNvPr id="15" name="Oval 14">
-            <a:extLst>
-              <a:ext uri="{FF2B5EF4-FFF2-40B4-BE49-F238E27FC236}">
-                <a16:creationId xmlns:a16="http://schemas.microsoft.com/office/drawing/2014/main" id="{01558D78-D7A3-4814-A937-6574B4F75B44}"/>
-              </a:ext>
-            </a:extLst>
-          </p:cNvPr>
+          <p:cNvPr id="15" name="Oval 14"/>
           <p:cNvSpPr>
             <a:spLocks noGrp="1"/>
           </p:cNvSpPr>
@@ -2958,32 +2779,31 @@
           <a:lstStyle/>
           <a:p>
             <a:pPr algn="ctr">
-              <a:defRPr sz="3184" b="1">
+              <a:defRPr sz="3185" b="1">
                 <a:solidFill>
                   <a:srgbClr val="FFFFFF"/>
                 </a:solidFill>
               </a:defRPr>
             </a:pPr>
             <a:r>
-              <a:rPr sz="3184" b="1">
+              <a:rPr sz="3185" b="1">
                 <a:solidFill>
                   <a:srgbClr val="FFFFFF"/>
                 </a:solidFill>
               </a:rPr>
               <a:t>11</a:t>
             </a:r>
-          </a:p>
-        </p:txBody>
-      </p:sp>
-      <p:sp>
-        <p:nvSpPr>
-          <p:cNvPr id="16" name="Rectangle 15">
-            <a:extLst>
-              <a:ext uri="{FF2B5EF4-FFF2-40B4-BE49-F238E27FC236}">
-                <a16:creationId xmlns:a16="http://schemas.microsoft.com/office/drawing/2014/main" id="{47C18D82-D561-45EC-8BE5-CB684F3593D1}"/>
-              </a:ext>
-            </a:extLst>
-          </p:cNvPr>
+            <a:endParaRPr sz="3185" b="1">
+              <a:solidFill>
+                <a:srgbClr val="FFFFFF"/>
+              </a:solidFill>
+            </a:endParaRPr>
+          </a:p>
+        </p:txBody>
+      </p:sp>
+      <p:sp>
+        <p:nvSpPr>
+          <p:cNvPr id="16" name="Rectangle 15"/>
           <p:cNvSpPr>
             <a:spLocks noGrp="1"/>
           </p:cNvSpPr>
@@ -3017,13 +2837,7 @@
       </p:sp>
       <p:sp>
         <p:nvSpPr>
-          <p:cNvPr id="17" name="Oval 16">
-            <a:extLst>
-              <a:ext uri="{FF2B5EF4-FFF2-40B4-BE49-F238E27FC236}">
-                <a16:creationId xmlns:a16="http://schemas.microsoft.com/office/drawing/2014/main" id="{86ECAE98-7F6F-4ECF-9AEB-F158CAFD4098}"/>
-              </a:ext>
-            </a:extLst>
-          </p:cNvPr>
+          <p:cNvPr id="17" name="Oval 16"/>
           <p:cNvSpPr>
             <a:spLocks noGrp="1"/>
           </p:cNvSpPr>
@@ -3064,18 +2878,17 @@
               </a:rPr>
               <a:t>4</a:t>
             </a:r>
-          </a:p>
-        </p:txBody>
-      </p:sp>
-      <p:sp>
-        <p:nvSpPr>
-          <p:cNvPr id="18" name="Rectangle 17">
-            <a:extLst>
-              <a:ext uri="{FF2B5EF4-FFF2-40B4-BE49-F238E27FC236}">
-                <a16:creationId xmlns:a16="http://schemas.microsoft.com/office/drawing/2014/main" id="{D20D6880-9C7E-4A7C-A6A4-5566296098B8}"/>
-              </a:ext>
-            </a:extLst>
-          </p:cNvPr>
+            <a:endParaRPr sz="2295" b="1">
+              <a:solidFill>
+                <a:srgbClr val="FFFFFF"/>
+              </a:solidFill>
+            </a:endParaRPr>
+          </a:p>
+        </p:txBody>
+      </p:sp>
+      <p:sp>
+        <p:nvSpPr>
+          <p:cNvPr id="18" name="Rectangle 17"/>
           <p:cNvSpPr>
             <a:spLocks noGrp="1"/>
           </p:cNvSpPr>
@@ -3109,13 +2922,7 @@
       </p:sp>
       <p:sp>
         <p:nvSpPr>
-          <p:cNvPr id="19" name="Rectangle 18">
-            <a:extLst>
-              <a:ext uri="{FF2B5EF4-FFF2-40B4-BE49-F238E27FC236}">
-                <a16:creationId xmlns:a16="http://schemas.microsoft.com/office/drawing/2014/main" id="{E2D38973-C013-48B8-BCCB-ED8D9F846E21}"/>
-              </a:ext>
-            </a:extLst>
-          </p:cNvPr>
+          <p:cNvPr id="19" name="Rectangle 18"/>
           <p:cNvSpPr>
             <a:spLocks noGrp="1"/>
           </p:cNvSpPr>
@@ -3149,13 +2956,7 @@
       </p:sp>
       <p:sp>
         <p:nvSpPr>
-          <p:cNvPr id="20" name="Oval 19">
-            <a:extLst>
-              <a:ext uri="{FF2B5EF4-FFF2-40B4-BE49-F238E27FC236}">
-                <a16:creationId xmlns:a16="http://schemas.microsoft.com/office/drawing/2014/main" id="{0AE0520D-1F35-453E-B5C4-BC8A37F19EAC}"/>
-              </a:ext>
-            </a:extLst>
-          </p:cNvPr>
+          <p:cNvPr id="20" name="Oval 19"/>
           <p:cNvSpPr>
             <a:spLocks noGrp="1"/>
           </p:cNvSpPr>
@@ -3187,13 +2988,7 @@
       </p:sp>
       <p:sp>
         <p:nvSpPr>
-          <p:cNvPr id="21" name="Oval 20">
-            <a:extLst>
-              <a:ext uri="{FF2B5EF4-FFF2-40B4-BE49-F238E27FC236}">
-                <a16:creationId xmlns:a16="http://schemas.microsoft.com/office/drawing/2014/main" id="{C8B0D8B5-511E-40A0-9CC9-32AB3EEA4545}"/>
-              </a:ext>
-            </a:extLst>
-          </p:cNvPr>
+          <p:cNvPr id="21" name="Oval 20"/>
           <p:cNvSpPr>
             <a:spLocks noGrp="1"/>
           </p:cNvSpPr>
@@ -3220,32 +3015,31 @@
           <a:lstStyle/>
           <a:p>
             <a:pPr algn="ctr">
-              <a:defRPr sz="2731" b="1">
+              <a:defRPr sz="2730" b="1">
                 <a:solidFill>
                   <a:srgbClr val="FFFFFF"/>
                 </a:solidFill>
               </a:defRPr>
             </a:pPr>
             <a:r>
-              <a:rPr sz="2731" b="1">
+              <a:rPr sz="2730" b="1">
                 <a:solidFill>
                   <a:srgbClr val="FFFFFF"/>
                 </a:solidFill>
               </a:rPr>
               <a:t>7</a:t>
             </a:r>
-          </a:p>
-        </p:txBody>
-      </p:sp>
-      <p:sp>
-        <p:nvSpPr>
-          <p:cNvPr id="22" name="Rectangle 21">
-            <a:extLst>
-              <a:ext uri="{FF2B5EF4-FFF2-40B4-BE49-F238E27FC236}">
-                <a16:creationId xmlns:a16="http://schemas.microsoft.com/office/drawing/2014/main" id="{01DCB0F4-E424-485B-8688-84FED188C35E}"/>
-              </a:ext>
-            </a:extLst>
-          </p:cNvPr>
+            <a:endParaRPr sz="2730" b="1">
+              <a:solidFill>
+                <a:srgbClr val="FFFFFF"/>
+              </a:solidFill>
+            </a:endParaRPr>
+          </a:p>
+        </p:txBody>
+      </p:sp>
+      <p:sp>
+        <p:nvSpPr>
+          <p:cNvPr id="22" name="Rectangle 21"/>
           <p:cNvSpPr>
             <a:spLocks noGrp="1"/>
           </p:cNvSpPr>
@@ -3279,13 +3073,7 @@
       </p:sp>
       <p:sp>
         <p:nvSpPr>
-          <p:cNvPr id="23" name="Oval 22">
-            <a:extLst>
-              <a:ext uri="{FF2B5EF4-FFF2-40B4-BE49-F238E27FC236}">
-                <a16:creationId xmlns:a16="http://schemas.microsoft.com/office/drawing/2014/main" id="{79981A53-72AE-4343-B866-13D7098482D6}"/>
-              </a:ext>
-            </a:extLst>
-          </p:cNvPr>
+          <p:cNvPr id="23" name="Oval 22"/>
           <p:cNvSpPr>
             <a:spLocks noGrp="1"/>
           </p:cNvSpPr>
@@ -3326,18 +3114,17 @@
               </a:rPr>
               <a:t>2</a:t>
             </a:r>
-          </a:p>
-        </p:txBody>
-      </p:sp>
-      <p:sp>
-        <p:nvSpPr>
-          <p:cNvPr id="24" name="Rectangle 23">
-            <a:extLst>
-              <a:ext uri="{FF2B5EF4-FFF2-40B4-BE49-F238E27FC236}">
-                <a16:creationId xmlns:a16="http://schemas.microsoft.com/office/drawing/2014/main" id="{910C246A-0A41-47B5-964C-64BF9223BB20}"/>
-              </a:ext>
-            </a:extLst>
-          </p:cNvPr>
+            <a:endParaRPr sz="1900" b="1">
+              <a:solidFill>
+                <a:srgbClr val="FFFFFF"/>
+              </a:solidFill>
+            </a:endParaRPr>
+          </a:p>
+        </p:txBody>
+      </p:sp>
+      <p:sp>
+        <p:nvSpPr>
+          <p:cNvPr id="24" name="Rectangle 23"/>
           <p:cNvSpPr>
             <a:spLocks noGrp="1"/>
           </p:cNvSpPr>
@@ -3371,13 +3158,7 @@
       </p:sp>
       <p:sp>
         <p:nvSpPr>
-          <p:cNvPr id="25" name="Rectangle 24">
-            <a:extLst>
-              <a:ext uri="{FF2B5EF4-FFF2-40B4-BE49-F238E27FC236}">
-                <a16:creationId xmlns:a16="http://schemas.microsoft.com/office/drawing/2014/main" id="{CCFDDE84-03D0-412C-87E9-CA6D0B7A589F}"/>
-              </a:ext>
-            </a:extLst>
-          </p:cNvPr>
+          <p:cNvPr id="25" name="Rectangle 24"/>
           <p:cNvSpPr>
             <a:spLocks noGrp="1"/>
           </p:cNvSpPr>
@@ -3411,13 +3192,7 @@
       </p:sp>
       <p:sp>
         <p:nvSpPr>
-          <p:cNvPr id="26" name="Rectangle 25">
-            <a:extLst>
-              <a:ext uri="{FF2B5EF4-FFF2-40B4-BE49-F238E27FC236}">
-                <a16:creationId xmlns:a16="http://schemas.microsoft.com/office/drawing/2014/main" id="{9176820A-81F8-490D-B51F-522FA6BCECE6}"/>
-              </a:ext>
-            </a:extLst>
-          </p:cNvPr>
+          <p:cNvPr id="26" name="Rectangle 25"/>
           <p:cNvSpPr>
             <a:spLocks noGrp="1"/>
           </p:cNvSpPr>
@@ -3451,13 +3226,7 @@
       </p:sp>
       <p:sp>
         <p:nvSpPr>
-          <p:cNvPr id="27" name="Oval 26">
-            <a:extLst>
-              <a:ext uri="{FF2B5EF4-FFF2-40B4-BE49-F238E27FC236}">
-                <a16:creationId xmlns:a16="http://schemas.microsoft.com/office/drawing/2014/main" id="{62681DA3-2FD7-4D7D-8839-D4808F3E63A2}"/>
-              </a:ext>
-            </a:extLst>
-          </p:cNvPr>
+          <p:cNvPr id="27" name="Oval 26"/>
           <p:cNvSpPr>
             <a:spLocks noGrp="1"/>
           </p:cNvSpPr>
@@ -3489,13 +3258,7 @@
       </p:sp>
       <p:sp>
         <p:nvSpPr>
-          <p:cNvPr id="28" name="Oval 27">
-            <a:extLst>
-              <a:ext uri="{FF2B5EF4-FFF2-40B4-BE49-F238E27FC236}">
-                <a16:creationId xmlns:a16="http://schemas.microsoft.com/office/drawing/2014/main" id="{FF280FFC-9AB8-4B17-84D6-18CFA9CAB99C}"/>
-              </a:ext>
-            </a:extLst>
-          </p:cNvPr>
+          <p:cNvPr id="28" name="Oval 27"/>
           <p:cNvSpPr>
             <a:spLocks noGrp="1"/>
           </p:cNvSpPr>
@@ -3522,32 +3285,31 @@
           <a:lstStyle/>
           <a:p>
             <a:pPr algn="ctr">
-              <a:defRPr sz="2854" b="1">
+              <a:defRPr sz="2855" b="1">
                 <a:solidFill>
                   <a:srgbClr val="FFFFFF"/>
                 </a:solidFill>
               </a:defRPr>
             </a:pPr>
             <a:r>
-              <a:rPr sz="2854" b="1">
+              <a:rPr sz="2855" b="1">
                 <a:solidFill>
                   <a:srgbClr val="FFFFFF"/>
                 </a:solidFill>
               </a:rPr>
               <a:t>8</a:t>
             </a:r>
-          </a:p>
-        </p:txBody>
-      </p:sp>
-      <p:sp>
-        <p:nvSpPr>
-          <p:cNvPr id="29" name="Rectangle 28">
-            <a:extLst>
-              <a:ext uri="{FF2B5EF4-FFF2-40B4-BE49-F238E27FC236}">
-                <a16:creationId xmlns:a16="http://schemas.microsoft.com/office/drawing/2014/main" id="{3FC653F5-0A52-4DAB-A4CC-391C149A26E9}"/>
-              </a:ext>
-            </a:extLst>
-          </p:cNvPr>
+            <a:endParaRPr sz="2855" b="1">
+              <a:solidFill>
+                <a:srgbClr val="FFFFFF"/>
+              </a:solidFill>
+            </a:endParaRPr>
+          </a:p>
+        </p:txBody>
+      </p:sp>
+      <p:sp>
+        <p:nvSpPr>
+          <p:cNvPr id="29" name="Rectangle 28"/>
           <p:cNvSpPr>
             <a:spLocks noGrp="1"/>
           </p:cNvSpPr>
@@ -3581,13 +3343,7 @@
       </p:sp>
       <p:sp>
         <p:nvSpPr>
-          <p:cNvPr id="30" name="Oval 29">
-            <a:extLst>
-              <a:ext uri="{FF2B5EF4-FFF2-40B4-BE49-F238E27FC236}">
-                <a16:creationId xmlns:a16="http://schemas.microsoft.com/office/drawing/2014/main" id="{7651BDC9-354C-4E31-9C4A-1CC2C6C6C8D8}"/>
-              </a:ext>
-            </a:extLst>
-          </p:cNvPr>
+          <p:cNvPr id="30" name="Oval 29"/>
           <p:cNvSpPr>
             <a:spLocks noGrp="1"/>
           </p:cNvSpPr>
@@ -3628,18 +3384,17 @@
               </a:rPr>
               <a:t>1</a:t>
             </a:r>
-          </a:p>
-        </p:txBody>
-      </p:sp>
-      <p:sp>
-        <p:nvSpPr>
-          <p:cNvPr id="31" name="Rectangle 30">
-            <a:extLst>
-              <a:ext uri="{FF2B5EF4-FFF2-40B4-BE49-F238E27FC236}">
-                <a16:creationId xmlns:a16="http://schemas.microsoft.com/office/drawing/2014/main" id="{9AAD1CDA-CE69-43F7-B928-617C9E980184}"/>
-              </a:ext>
-            </a:extLst>
-          </p:cNvPr>
+            <a:endParaRPr sz="1620" b="1">
+              <a:solidFill>
+                <a:srgbClr val="FFFFFF"/>
+              </a:solidFill>
+            </a:endParaRPr>
+          </a:p>
+        </p:txBody>
+      </p:sp>
+      <p:sp>
+        <p:nvSpPr>
+          <p:cNvPr id="31" name="Rectangle 30"/>
           <p:cNvSpPr>
             <a:spLocks noGrp="1"/>
           </p:cNvSpPr>
@@ -3673,13 +3428,7 @@
       </p:sp>
       <p:sp>
         <p:nvSpPr>
-          <p:cNvPr id="32" name="Rectangle 31">
-            <a:extLst>
-              <a:ext uri="{FF2B5EF4-FFF2-40B4-BE49-F238E27FC236}">
-                <a16:creationId xmlns:a16="http://schemas.microsoft.com/office/drawing/2014/main" id="{3B9FC05F-8444-4AE9-9F84-23FA06700265}"/>
-              </a:ext>
-            </a:extLst>
-          </p:cNvPr>
+          <p:cNvPr id="32" name="Rectangle 31"/>
           <p:cNvSpPr>
             <a:spLocks noGrp="1"/>
           </p:cNvSpPr>
@@ -3713,13 +3462,7 @@
       </p:sp>
       <p:sp>
         <p:nvSpPr>
-          <p:cNvPr id="33" name="Oval 32">
-            <a:extLst>
-              <a:ext uri="{FF2B5EF4-FFF2-40B4-BE49-F238E27FC236}">
-                <a16:creationId xmlns:a16="http://schemas.microsoft.com/office/drawing/2014/main" id="{4F3CA0CF-BCBD-4799-B4A4-058F78E9AB00}"/>
-              </a:ext>
-            </a:extLst>
-          </p:cNvPr>
+          <p:cNvPr id="33" name="Oval 32"/>
           <p:cNvSpPr>
             <a:spLocks noGrp="1"/>
           </p:cNvSpPr>
@@ -3760,18 +3503,17 @@
               </a:rPr>
               <a:t>4</a:t>
             </a:r>
-          </a:p>
-        </p:txBody>
-      </p:sp>
-      <p:sp>
-        <p:nvSpPr>
-          <p:cNvPr id="34" name="Rectangle 33">
-            <a:extLst>
-              <a:ext uri="{FF2B5EF4-FFF2-40B4-BE49-F238E27FC236}">
-                <a16:creationId xmlns:a16="http://schemas.microsoft.com/office/drawing/2014/main" id="{8725190E-B5B0-4F94-877E-D29123E9C70B}"/>
-              </a:ext>
-            </a:extLst>
-          </p:cNvPr>
+            <a:endParaRPr sz="2295" b="1">
+              <a:solidFill>
+                <a:srgbClr val="FFFFFF"/>
+              </a:solidFill>
+            </a:endParaRPr>
+          </a:p>
+        </p:txBody>
+      </p:sp>
+      <p:sp>
+        <p:nvSpPr>
+          <p:cNvPr id="34" name="Rectangle 33"/>
           <p:cNvSpPr>
             <a:spLocks noGrp="1"/>
           </p:cNvSpPr>
@@ -3805,13 +3547,7 @@
       </p:sp>
       <p:sp>
         <p:nvSpPr>
-          <p:cNvPr id="35" name="Oval 34">
-            <a:extLst>
-              <a:ext uri="{FF2B5EF4-FFF2-40B4-BE49-F238E27FC236}">
-                <a16:creationId xmlns:a16="http://schemas.microsoft.com/office/drawing/2014/main" id="{43769277-5065-4677-8E3C-FF0769A9745A}"/>
-              </a:ext>
-            </a:extLst>
-          </p:cNvPr>
+          <p:cNvPr id="35" name="Oval 34"/>
           <p:cNvSpPr>
             <a:spLocks noGrp="1"/>
           </p:cNvSpPr>
@@ -3852,18 +3588,17 @@
               </a:rPr>
               <a:t>1</a:t>
             </a:r>
-          </a:p>
-        </p:txBody>
-      </p:sp>
-      <p:sp>
-        <p:nvSpPr>
-          <p:cNvPr id="36" name="Rectangle 35">
-            <a:extLst>
-              <a:ext uri="{FF2B5EF4-FFF2-40B4-BE49-F238E27FC236}">
-                <a16:creationId xmlns:a16="http://schemas.microsoft.com/office/drawing/2014/main" id="{570DFF3C-BA9E-4835-858E-8DB82A9841EC}"/>
-              </a:ext>
-            </a:extLst>
-          </p:cNvPr>
+            <a:endParaRPr sz="1620" b="1">
+              <a:solidFill>
+                <a:srgbClr val="FFFFFF"/>
+              </a:solidFill>
+            </a:endParaRPr>
+          </a:p>
+        </p:txBody>
+      </p:sp>
+      <p:sp>
+        <p:nvSpPr>
+          <p:cNvPr id="36" name="Rectangle 35"/>
           <p:cNvSpPr>
             <a:spLocks noGrp="1"/>
           </p:cNvSpPr>
@@ -3897,13 +3632,7 @@
       </p:sp>
       <p:sp>
         <p:nvSpPr>
-          <p:cNvPr id="37" name="Oval 36">
-            <a:extLst>
-              <a:ext uri="{FF2B5EF4-FFF2-40B4-BE49-F238E27FC236}">
-                <a16:creationId xmlns:a16="http://schemas.microsoft.com/office/drawing/2014/main" id="{7A70DBA3-CF95-4867-8716-F1C65D011EE2}"/>
-              </a:ext>
-            </a:extLst>
-          </p:cNvPr>
+          <p:cNvPr id="37" name="Oval 36"/>
           <p:cNvSpPr>
             <a:spLocks noGrp="1"/>
           </p:cNvSpPr>
@@ -3935,13 +3664,7 @@
       </p:sp>
       <p:sp>
         <p:nvSpPr>
-          <p:cNvPr id="38" name="Oval 37">
-            <a:extLst>
-              <a:ext uri="{FF2B5EF4-FFF2-40B4-BE49-F238E27FC236}">
-                <a16:creationId xmlns:a16="http://schemas.microsoft.com/office/drawing/2014/main" id="{FF56FFB2-057D-466C-B8DB-E35C3E54CA4A}"/>
-              </a:ext>
-            </a:extLst>
-          </p:cNvPr>
+          <p:cNvPr id="38" name="Oval 37"/>
           <p:cNvSpPr>
             <a:spLocks noGrp="1"/>
           </p:cNvSpPr>
@@ -3982,18 +3705,17 @@
               </a:rPr>
               <a:t>1</a:t>
             </a:r>
-          </a:p>
-        </p:txBody>
-      </p:sp>
-      <p:sp>
-        <p:nvSpPr>
-          <p:cNvPr id="39" name="Rectangle 38">
-            <a:extLst>
-              <a:ext uri="{FF2B5EF4-FFF2-40B4-BE49-F238E27FC236}">
-                <a16:creationId xmlns:a16="http://schemas.microsoft.com/office/drawing/2014/main" id="{DD9DD9CA-035F-45B8-AB4E-4B060BB9945A}"/>
-              </a:ext>
-            </a:extLst>
-          </p:cNvPr>
+            <a:endParaRPr sz="1620" b="1">
+              <a:solidFill>
+                <a:srgbClr val="FFFFFF"/>
+              </a:solidFill>
+            </a:endParaRPr>
+          </a:p>
+        </p:txBody>
+      </p:sp>
+      <p:sp>
+        <p:nvSpPr>
+          <p:cNvPr id="39" name="Rectangle 38"/>
           <p:cNvSpPr>
             <a:spLocks noGrp="1"/>
           </p:cNvSpPr>
@@ -4027,13 +3749,7 @@
       </p:sp>
       <p:sp>
         <p:nvSpPr>
-          <p:cNvPr id="40" name="Oval 39">
-            <a:extLst>
-              <a:ext uri="{FF2B5EF4-FFF2-40B4-BE49-F238E27FC236}">
-                <a16:creationId xmlns:a16="http://schemas.microsoft.com/office/drawing/2014/main" id="{7F780A8E-F621-4651-BFC7-7D18BD6F693C}"/>
-              </a:ext>
-            </a:extLst>
-          </p:cNvPr>
+          <p:cNvPr id="40" name="Oval 39"/>
           <p:cNvSpPr>
             <a:spLocks noGrp="1"/>
           </p:cNvSpPr>
@@ -4060,32 +3776,31 @@
           <a:lstStyle/>
           <a:p>
             <a:pPr algn="ctr">
-              <a:defRPr sz="2598" b="1">
+              <a:defRPr sz="2600" b="1">
                 <a:solidFill>
                   <a:srgbClr val="FFFFFF"/>
                 </a:solidFill>
               </a:defRPr>
             </a:pPr>
             <a:r>
-              <a:rPr sz="2598" b="1">
+              <a:rPr sz="2600" b="1">
                 <a:solidFill>
                   <a:srgbClr val="FFFFFF"/>
                 </a:solidFill>
               </a:rPr>
               <a:t>6</a:t>
             </a:r>
-          </a:p>
-        </p:txBody>
-      </p:sp>
-      <p:sp>
-        <p:nvSpPr>
-          <p:cNvPr id="41" name="Rectangle 40">
-            <a:extLst>
-              <a:ext uri="{FF2B5EF4-FFF2-40B4-BE49-F238E27FC236}">
-                <a16:creationId xmlns:a16="http://schemas.microsoft.com/office/drawing/2014/main" id="{D128E203-E5D2-4005-A7B2-16222BDD9B66}"/>
-              </a:ext>
-            </a:extLst>
-          </p:cNvPr>
+            <a:endParaRPr sz="2600" b="1">
+              <a:solidFill>
+                <a:srgbClr val="FFFFFF"/>
+              </a:solidFill>
+            </a:endParaRPr>
+          </a:p>
+        </p:txBody>
+      </p:sp>
+      <p:sp>
+        <p:nvSpPr>
+          <p:cNvPr id="41" name="Rectangle 40"/>
           <p:cNvSpPr>
             <a:spLocks noGrp="1"/>
           </p:cNvSpPr>
@@ -4119,13 +3834,7 @@
       </p:sp>
       <p:sp>
         <p:nvSpPr>
-          <p:cNvPr id="42" name="Oval 41">
-            <a:extLst>
-              <a:ext uri="{FF2B5EF4-FFF2-40B4-BE49-F238E27FC236}">
-                <a16:creationId xmlns:a16="http://schemas.microsoft.com/office/drawing/2014/main" id="{5D490DE9-8704-4D81-BC08-076C46F431CD}"/>
-              </a:ext>
-            </a:extLst>
-          </p:cNvPr>
+          <p:cNvPr id="42" name="Oval 41"/>
           <p:cNvSpPr>
             <a:spLocks noGrp="1"/>
           </p:cNvSpPr>
@@ -4150,20 +3859,12 @@
         <p:txBody>
           <a:bodyPr/>
           <a:lstStyle/>
-          <a:p>
-            <a:endParaRPr/>
-          </a:p>
-        </p:txBody>
-      </p:sp>
-      <p:sp>
-        <p:nvSpPr>
-          <p:cNvPr id="43" name="Rectangle 42">
-            <a:extLst>
-              <a:ext uri="{FF2B5EF4-FFF2-40B4-BE49-F238E27FC236}">
-                <a16:creationId xmlns:a16="http://schemas.microsoft.com/office/drawing/2014/main" id="{955BCA87-F1C4-419B-BD68-92292CD7C2BF}"/>
-              </a:ext>
-            </a:extLst>
-          </p:cNvPr>
+          <a:p/>
+        </p:txBody>
+      </p:sp>
+      <p:sp>
+        <p:nvSpPr>
+          <p:cNvPr id="43" name="Rectangle 42"/>
           <p:cNvSpPr>
             <a:spLocks noGrp="1"/>
           </p:cNvSpPr>
@@ -4202,18 +3903,17 @@
               </a:rPr>
               <a:t>Bubble size = paper count</a:t>
             </a:r>
-          </a:p>
-        </p:txBody>
-      </p:sp>
-      <p:sp>
-        <p:nvSpPr>
-          <p:cNvPr id="44" name="Oval 43">
-            <a:extLst>
-              <a:ext uri="{FF2B5EF4-FFF2-40B4-BE49-F238E27FC236}">
-                <a16:creationId xmlns:a16="http://schemas.microsoft.com/office/drawing/2014/main" id="{D346257B-7A0F-4A7A-8DFF-211323DBC066}"/>
-              </a:ext>
-            </a:extLst>
-          </p:cNvPr>
+            <a:endParaRPr sz="1350" b="0">
+              <a:solidFill>
+                <a:srgbClr val="0B163F"/>
+              </a:solidFill>
+            </a:endParaRPr>
+          </a:p>
+        </p:txBody>
+      </p:sp>
+      <p:sp>
+        <p:nvSpPr>
+          <p:cNvPr id="44" name="Oval 43"/>
           <p:cNvSpPr>
             <a:spLocks noGrp="1"/>
           </p:cNvSpPr>
@@ -4245,13 +3945,7 @@
       </p:sp>
       <p:sp>
         <p:nvSpPr>
-          <p:cNvPr id="45" name="Rectangle 44">
-            <a:extLst>
-              <a:ext uri="{FF2B5EF4-FFF2-40B4-BE49-F238E27FC236}">
-                <a16:creationId xmlns:a16="http://schemas.microsoft.com/office/drawing/2014/main" id="{187D7B74-C41E-4459-9CA9-EF404C1E1970}"/>
-              </a:ext>
-            </a:extLst>
-          </p:cNvPr>
+          <p:cNvPr id="45" name="Rectangle 44"/>
           <p:cNvSpPr>
             <a:spLocks noGrp="1"/>
           </p:cNvSpPr>
@@ -4290,15 +3984,15 @@
               </a:rPr>
               <a:t>Blue ring = open-source code available</a:t>
             </a:r>
+            <a:endParaRPr sz="1350" b="0">
+              <a:solidFill>
+                <a:srgbClr val="0B163F"/>
+              </a:solidFill>
+            </a:endParaRPr>
           </a:p>
         </p:txBody>
       </p:sp>
     </p:spTree>
-    <p:extLst>
-      <p:ext uri="{BB962C8B-B14F-4D97-AF65-F5344CB8AC3E}">
-        <p14:creationId xmlns:p14="http://schemas.microsoft.com/office/powerpoint/2010/main" val="108382113"/>
-      </p:ext>
-    </p:extLst>
   </p:cSld>
   <p:clrMapOvr>
     <a:masterClrMapping/>
@@ -4548,8 +4242,11 @@
       </a:bgFillStyleLst>
     </a:fmtScheme>
   </a:themeElements>
-  <a:objectDefaults/>
-  <a:extraClrSchemeLst/>
+  <a:extLst>
+    <a:ext uri="{05A4C25C-085E-4340-85A3-A5531E510DB2}">
+      <thm15:themeFamily xmlns:thm15="http://schemas.microsoft.com/office/thememl/2012/main" name="Office Theme" id="{62F939B6-93AF-4DB8-9C6B-D6C7DFDC589F}" vid="{4A3C46E8-61CC-4603-A589-7422A47A8E4A}"/>
+    </a:ext>
+  </a:extLst>
 </a:theme>
 </file>
 
@@ -4795,7 +4492,10 @@
       </a:bgFillStyleLst>
     </a:fmtScheme>
   </a:themeElements>
-  <a:objectDefaults/>
-  <a:extraClrSchemeLst/>
+  <a:extLst>
+    <a:ext uri="{05A4C25C-085E-4340-85A3-A5531E510DB2}">
+      <thm15:themeFamily xmlns:thm15="http://schemas.microsoft.com/office/thememl/2012/main" name="Office Theme" id="{62F939B6-93AF-4DB8-9C6B-D6C7DFDC589F}" vid="{4A3C46E8-61CC-4603-A589-7422A47A8E4A}"/>
+    </a:ext>
+  </a:extLst>
 </a:theme>
 </file>